--- a/inbox/Application Aware Networking/Book_02_FedAAN_Network_Access_Control_802_1X.pptx
+++ b/inbox/Application Aware Networking/Book_02_FedAAN_Network_Access_Control_802_1X.pptx
@@ -31,9 +31,10 @@
     <p:sldId id="279" r:id="rId25"/>
     <p:sldId id="280" r:id="rId26"/>
     <p:sldId id="281" r:id="rId27"/>
+    <p:sldId id="282" r:id="rId28"/>
   </p:sldIdLst>
   <p:notesMasterIdLst>
-    <p:notesMasterId r:id="rId28"/>
+    <p:notesMasterId r:id="rId29"/>
   </p:notesMasterIdLst>
   <p:sldSz cx="9144000" cy="5143500"/>
   <p:notesSz cx="5143500" cy="9144000"/>
@@ -2129,8 +2130,8 @@
           <a:p>
             <a:r>
               <a:rPr lang="en-US" dirty="0"/>
-              <a:t>Closing slide — the continuum framing from Book 02's final section. Every admission decision in this deck answers the same three questions: is this device known, is its identity proven, is its posture current? What varies across the series is where the answer is enforced. At the port, enforcement is a VLAN — location-bound by construction; it protects the wire and only the wire. The moment the same device reaches an application through a cloud front door or ZTNA broker, the port's verdict is out of scope — so Zero Trust Network Access re-asks the questions per access request and enforces the answer in a TOKEN: the device certificate minted here becomes a claim, the Intune compliance state evaluated here becomes a claim, and the access token carries both to whatever policy enforcement point fronts the resource. This is a continuum, not a replacement: Part 3 takes the machine certificate this book provisions and generalizes it into the series' cryptographic identity plane — same SCEP pipeline, same TPM-bound keys, same revocation infrastructure, now issuing identities for users, services, and workloads. Part 5 rebuilds the network around those identities. The port remains the enforcement point for the one layer no token can reach — the physical wire. The asks: OIS validation of the hostname-cert binding design; the RADIUS platform decision (NPS vs. ISE vs. ClearPass); approval of the phased rollout window; and ownership of the MAB exception process. Everything scoped to FedRAMP Moderate; the Date Code on the title slide identifies this version.
-Vendor sources: https://csrc.nist.gov/pubs/sp/800/53/r5/upd1/final | uiao repo: inbox/Application Aware Networking/Book_02_FedAAN_Network_Access_Control_802_1X.qmd</a:t>
+              <a:t>The federal compliance clock — added in the 2026-07-07 timeline pass; the fully-sourced version with the elapsed baseline lives in the Federal AAN / ConMon Gap Roadmap, the series' single source of truth for dates. Walk the rows: August 3 and 31, 2026 — FedRAMP 20x submission windows open, Class A first, then Class B and C, which is the GCC Moderate window (marketplace listings opened July 6; FedRAMP Ready went legacy July 28; temporary Rev5 conversion paths opened August 10). August 7, 2026 — BOD 26-04 (issued June 10, 2026) requires agency vulnerability-management policies to support risk-based remediation under its four-variable model: exposure, KEV listing, exploit automatability, and technical impact, with timelines from 3 days to deferral. September 21, 2026 — every FIPS 140-2 certificate moves to NIST's Historical List, ending new procurement reliance on 140-2-only validated modules; verify cryptographic modules are FIPS 140-3 tracked. December 7, 2026 — BOD 26-04's remediation timelines take force AND FedRAMP's Vulnerability Detection and Response / Vulnerability Evaluation and Reporting rules become mandatory: SBOM plus vendor disclosure. January 1, 2027 — the Consolidated Rules become mandatory for all FedRAMP systems, and CNSA 2.0's acquisition gate opens for National Security Systems (ML-KEM-1024, ML-DSA-87 — NSS-scoped, with the civilian trajectory following via M-23-02). June 11, 2027 — no new Rev5 certifications. Around August 2027 — the next scheduled NIST 800-53 release on the two-year cadence; note Release 5.2.0 (August 27, 2025) already added SA-15(13), SA-24, and SI-2(7), which are not yet mapped in the series' Parts 11/15 closure tables — a tracked action item. 2030/2035 — quantum-vulnerable cryptography is deprecated then prohibited; M-23-02's annual crypto inventories run to that horizon. The bottom bar reminds the audience of the mandates already in force: M-21-31 logging tiers, M-21-07 IPv6 targets, M-22-09 Zero Trust goals (past due but still measured, continued by M-24-14 and M-25-04), and BOD 25-01 SCuBA policies.
+Vendor sources: https://www.fedramp.gov/20x/ | https://www.cisa.gov/news-events/directives/bod-26-04-prioritizing-security-updates-based-risk | https://csrc.nist.gov/News/2025/nist-releases-revision-to-sp-800-53-controls | uiao repo: inbox/Application Aware Networking/federal-aan-conmon-gap-roadmap.md</a:t>
             </a:r>
             <a:endParaRPr lang="en-US" dirty="0"/>
           </a:p>
@@ -2154,6 +2155,95 @@
             <a:fld id="{F7021451-1387-4CA6-816F-3879F97B5CBC}" type="slidenum">
               <a:rPr lang="en-US"/>
               <a:t>26</a:t>
+            </a:fld>
+            <a:endParaRPr lang="en-US"/>
+          </a:p>
+        </p:txBody>
+      </p:sp>
+    </p:spTree>
+    <p:extLst>
+      <p:ext uri="{BB962C8B-B14F-4D97-AF65-F5344CB8AC3E}">
+        <p14:creationId xmlns:p14="http://schemas.microsoft.com/office/powerpoint/2010/main" val="1024086991"/>
+      </p:ext>
+    </p:extLst>
+  </p:cSld>
+  <p:clrMapOvr>
+    <a:masterClrMapping/>
+  </p:clrMapOvr>
+</p:notes>
+</file>
+
+<file path=ppt/notesSlides/notesSlide27.xml><?xml version="1.0" encoding="utf-8"?>
+<p:notes xmlns:a="http://schemas.openxmlformats.org/drawingml/2006/main" xmlns:r="http://schemas.openxmlformats.org/officeDocument/2006/relationships" xmlns:p="http://schemas.openxmlformats.org/presentationml/2006/main">
+  <p:cSld>
+    <p:spTree>
+      <p:nvGrpSpPr>
+        <p:cNvPr id="1" name=""/>
+        <p:cNvGrpSpPr/>
+        <p:nvPr/>
+      </p:nvGrpSpPr>
+      <p:grpSpPr>
+        <a:xfrm>
+          <a:off x="0" y="0"/>
+          <a:ext cx="0" cy="0"/>
+          <a:chOff x="0" y="0"/>
+          <a:chExt cx="0" cy="0"/>
+        </a:xfrm>
+      </p:grpSpPr>
+      <p:sp>
+        <p:nvSpPr>
+          <p:cNvPr id="2" name="Slide Image Placeholder 1"/>
+          <p:cNvSpPr>
+            <a:spLocks noGrp="1" noRot="1" noChangeAspect="1"/>
+          </p:cNvSpPr>
+          <p:nvPr>
+            <p:ph type="sldImg"/>
+          </p:nvPr>
+        </p:nvSpPr>
+        <p:spPr/>
+      </p:sp>
+      <p:sp>
+        <p:nvSpPr>
+          <p:cNvPr id="3" name="Notes Placeholder 2"/>
+          <p:cNvSpPr>
+            <a:spLocks noGrp="1"/>
+          </p:cNvSpPr>
+          <p:nvPr>
+            <p:ph type="body" idx="1"/>
+          </p:nvPr>
+        </p:nvSpPr>
+        <p:spPr/>
+        <p:txBody>
+          <a:bodyPr/>
+          <a:lstStyle/>
+          <a:p>
+            <a:r>
+              <a:rPr lang="en-US" dirty="0"/>
+              <a:t>Closing slide — the continuum framing from Book 02's final section. Every admission decision in this deck answers the same three questions: is this device known, is its identity proven, is its posture current? What varies across the series is where the answer is enforced. At the port, enforcement is a VLAN — location-bound by construction; it protects the wire and only the wire. The moment the same device reaches an application through a cloud front door or ZTNA broker, the port's verdict is out of scope — so Zero Trust Network Access re-asks the questions per access request and enforces the answer in a TOKEN: the device certificate minted here becomes a claim, the Intune compliance state evaluated here becomes a claim, and the access token carries both to whatever policy enforcement point fronts the resource. This is a continuum, not a replacement: Part 3 takes the machine certificate this book provisions and generalizes it into the series' cryptographic identity plane — same SCEP pipeline, same TPM-bound keys, same revocation infrastructure, now issuing identities for users, services, and workloads. Part 5 rebuilds the network around those identities. The port remains the enforcement point for the one layer no token can reach — the physical wire. The asks: OIS validation of the hostname-cert binding design; the RADIUS platform decision (NPS vs. ISE vs. ClearPass); approval of the phased rollout window; and ownership of the MAB exception process. Everything scoped to FedRAMP Moderate; the Date Code on the title slide identifies this version.
+Vendor sources: https://csrc.nist.gov/pubs/sp/800/53/r5/upd1/final | uiao repo: inbox/Application Aware Networking/Book_02_FedAAN_Network_Access_Control_802_1X.qmd</a:t>
+            </a:r>
+            <a:endParaRPr lang="en-US" dirty="0"/>
+          </a:p>
+        </p:txBody>
+      </p:sp>
+      <p:sp>
+        <p:nvSpPr>
+          <p:cNvPr id="4" name="Slide Number Placeholder 3"/>
+          <p:cNvSpPr>
+            <a:spLocks noGrp="1"/>
+          </p:cNvSpPr>
+          <p:nvPr>
+            <p:ph type="sldNum" sz="quarter" idx="10"/>
+          </p:nvPr>
+        </p:nvSpPr>
+        <p:spPr/>
+        <p:txBody>
+          <a:bodyPr/>
+          <a:lstStyle/>
+          <a:p>
+            <a:fld id="{F7021451-1387-4CA6-816F-3879F97B5CBC}" type="slidenum">
+              <a:rPr lang="en-US"/>
+              <a:t>27</a:t>
             </a:fld>
             <a:endParaRPr lang="en-US"/>
           </a:p>
@@ -3674,7 +3764,7 @@
                 <a:ea typeface="Arial" pitchFamily="34" charset="-122"/>
                 <a:cs typeface="Arial" pitchFamily="34" charset="-120"/>
               </a:rPr>
-              <a:t>Date Code: 2026-07-07 10:15 ET</a:t>
+              <a:t>Date Code: 2026-07-07 11:57 ET</a:t>
             </a:r>
             <a:endParaRPr lang="en-US" sz="1000" dirty="0"/>
           </a:p>
@@ -3889,7 +3979,7 @@
                 <a:ea typeface="Arial" pitchFamily="34" charset="-122"/>
                 <a:cs typeface="Arial" pitchFamily="34" charset="-120"/>
               </a:rPr>
-              <a:t>Federal AAN — Book 02 NAC/802.1X · CSI Team Draft — Internal · FedRAMP Moderate · Date Code 2026-07-07 10:15 ET</a:t>
+              <a:t>Federal AAN — Book 02 NAC/802.1X · CSI Team Draft — Internal · FedRAMP Moderate · Date Code 2026-07-07 11:57 ET</a:t>
             </a:r>
             <a:endParaRPr lang="en-US" sz="800" dirty="0"/>
           </a:p>
@@ -4659,7 +4749,7 @@
                 <a:ea typeface="Arial" pitchFamily="34" charset="-122"/>
                 <a:cs typeface="Arial" pitchFamily="34" charset="-120"/>
               </a:rPr>
-              <a:t>Federal AAN — Book 02 NAC/802.1X · CSI Team Draft — Internal · FedRAMP Moderate · Date Code 2026-07-07 10:15 ET</a:t>
+              <a:t>Federal AAN — Book 02 NAC/802.1X · CSI Team Draft — Internal · FedRAMP Moderate · Date Code 2026-07-07 11:57 ET</a:t>
             </a:r>
             <a:endParaRPr lang="en-US" sz="800" dirty="0"/>
           </a:p>
@@ -5748,7 +5838,7 @@
                 <a:ea typeface="Arial" pitchFamily="34" charset="-122"/>
                 <a:cs typeface="Arial" pitchFamily="34" charset="-120"/>
               </a:rPr>
-              <a:t>Federal AAN — Book 02 NAC/802.1X · CSI Team Draft — Internal · FedRAMP Moderate · Date Code 2026-07-07 10:15 ET</a:t>
+              <a:t>Federal AAN — Book 02 NAC/802.1X · CSI Team Draft — Internal · FedRAMP Moderate · Date Code 2026-07-07 11:57 ET</a:t>
             </a:r>
             <a:endParaRPr lang="en-US" sz="800" dirty="0"/>
           </a:p>
@@ -6839,7 +6929,7 @@
                 <a:ea typeface="Arial" pitchFamily="34" charset="-122"/>
                 <a:cs typeface="Arial" pitchFamily="34" charset="-120"/>
               </a:rPr>
-              <a:t>Federal AAN — Book 02 NAC/802.1X · CSI Team Draft — Internal · FedRAMP Moderate · Date Code 2026-07-07 10:15 ET</a:t>
+              <a:t>Federal AAN — Book 02 NAC/802.1X · CSI Team Draft — Internal · FedRAMP Moderate · Date Code 2026-07-07 11:57 ET</a:t>
             </a:r>
             <a:endParaRPr lang="en-US" sz="800" dirty="0"/>
           </a:p>
@@ -7932,7 +8022,7 @@
                 <a:ea typeface="Arial" pitchFamily="34" charset="-122"/>
                 <a:cs typeface="Arial" pitchFamily="34" charset="-120"/>
               </a:rPr>
-              <a:t>Federal AAN — Book 02 NAC/802.1X · CSI Team Draft — Internal · FedRAMP Moderate · Date Code 2026-07-07 10:15 ET</a:t>
+              <a:t>Federal AAN — Book 02 NAC/802.1X · CSI Team Draft — Internal · FedRAMP Moderate · Date Code 2026-07-07 11:57 ET</a:t>
             </a:r>
             <a:endParaRPr lang="en-US" sz="800" dirty="0"/>
           </a:p>
@@ -9027,7 +9117,7 @@
                 <a:ea typeface="Arial" pitchFamily="34" charset="-122"/>
                 <a:cs typeface="Arial" pitchFamily="34" charset="-120"/>
               </a:rPr>
-              <a:t>Federal AAN — Book 02 NAC/802.1X · CSI Team Draft — Internal · FedRAMP Moderate · Date Code 2026-07-07 10:15 ET</a:t>
+              <a:t>Federal AAN — Book 02 NAC/802.1X · CSI Team Draft — Internal · FedRAMP Moderate · Date Code 2026-07-07 11:57 ET</a:t>
             </a:r>
             <a:endParaRPr lang="en-US" sz="800" dirty="0"/>
           </a:p>
@@ -10103,7 +10193,7 @@
                 <a:ea typeface="Arial" pitchFamily="34" charset="-122"/>
                 <a:cs typeface="Arial" pitchFamily="34" charset="-120"/>
               </a:rPr>
-              <a:t>Federal AAN — Book 02 NAC/802.1X · CSI Team Draft — Internal · FedRAMP Moderate · Date Code 2026-07-07 10:15 ET</a:t>
+              <a:t>Federal AAN — Book 02 NAC/802.1X · CSI Team Draft — Internal · FedRAMP Moderate · Date Code 2026-07-07 11:57 ET</a:t>
             </a:r>
             <a:endParaRPr lang="en-US" sz="800" dirty="0"/>
           </a:p>
@@ -11186,7 +11276,7 @@
                 <a:ea typeface="Arial" pitchFamily="34" charset="-122"/>
                 <a:cs typeface="Arial" pitchFamily="34" charset="-120"/>
               </a:rPr>
-              <a:t>Federal AAN — Book 02 NAC/802.1X · CSI Team Draft — Internal · FedRAMP Moderate · Date Code 2026-07-07 10:15 ET</a:t>
+              <a:t>Federal AAN — Book 02 NAC/802.1X · CSI Team Draft — Internal · FedRAMP Moderate · Date Code 2026-07-07 11:57 ET</a:t>
             </a:r>
             <a:endParaRPr lang="en-US" sz="800" dirty="0"/>
           </a:p>
@@ -12283,7 +12373,7 @@
                 <a:ea typeface="Arial" pitchFamily="34" charset="-122"/>
                 <a:cs typeface="Arial" pitchFamily="34" charset="-120"/>
               </a:rPr>
-              <a:t>Federal AAN — Book 02 NAC/802.1X · CSI Team Draft — Internal · FedRAMP Moderate · Date Code 2026-07-07 10:15 ET</a:t>
+              <a:t>Federal AAN — Book 02 NAC/802.1X · CSI Team Draft — Internal · FedRAMP Moderate · Date Code 2026-07-07 11:57 ET</a:t>
             </a:r>
             <a:endParaRPr lang="en-US" sz="800" dirty="0"/>
           </a:p>
@@ -12953,7 +13043,7 @@
                 <a:ea typeface="Arial" pitchFamily="34" charset="-122"/>
                 <a:cs typeface="Arial" pitchFamily="34" charset="-120"/>
               </a:rPr>
-              <a:t>Federal AAN — Book 02 NAC/802.1X · CSI Team Draft — Internal · FedRAMP Moderate · Date Code 2026-07-07 10:15 ET</a:t>
+              <a:t>Federal AAN — Book 02 NAC/802.1X · CSI Team Draft — Internal · FedRAMP Moderate · Date Code 2026-07-07 11:57 ET</a:t>
             </a:r>
             <a:endParaRPr lang="en-US" sz="800" dirty="0"/>
           </a:p>
@@ -14676,7 +14766,7 @@
                 <a:ea typeface="Arial" pitchFamily="34" charset="-122"/>
                 <a:cs typeface="Arial" pitchFamily="34" charset="-120"/>
               </a:rPr>
-              <a:t>Federal AAN — Book 02 NAC/802.1X · CSI Team Draft — Internal · FedRAMP Moderate · Date Code 2026-07-07 10:15 ET</a:t>
+              <a:t>Federal AAN — Book 02 NAC/802.1X · CSI Team Draft — Internal · FedRAMP Moderate · Date Code 2026-07-07 11:57 ET</a:t>
             </a:r>
             <a:endParaRPr lang="en-US" sz="800" dirty="0"/>
           </a:p>
@@ -15311,7 +15401,7 @@
                 <a:ea typeface="Arial" pitchFamily="34" charset="-122"/>
                 <a:cs typeface="Arial" pitchFamily="34" charset="-120"/>
               </a:rPr>
-              <a:t>Federal AAN — Book 02 NAC/802.1X · CSI Team Draft — Internal · FedRAMP Moderate · Date Code 2026-07-07 10:15 ET</a:t>
+              <a:t>Federal AAN — Book 02 NAC/802.1X · CSI Team Draft — Internal · FedRAMP Moderate · Date Code 2026-07-07 11:57 ET</a:t>
             </a:r>
             <a:endParaRPr lang="en-US" sz="800" dirty="0"/>
           </a:p>
@@ -15925,7 +16015,7 @@
                 <a:ea typeface="Arial" pitchFamily="34" charset="-122"/>
                 <a:cs typeface="Arial" pitchFamily="34" charset="-120"/>
               </a:rPr>
-              <a:t>Federal AAN — Book 02 NAC/802.1X · CSI Team Draft — Internal · FedRAMP Moderate · Date Code 2026-07-07 10:15 ET</a:t>
+              <a:t>Federal AAN — Book 02 NAC/802.1X · CSI Team Draft — Internal · FedRAMP Moderate · Date Code 2026-07-07 11:57 ET</a:t>
             </a:r>
             <a:endParaRPr lang="en-US" sz="800" dirty="0"/>
           </a:p>
@@ -16595,7 +16685,7 @@
                 <a:ea typeface="Arial" pitchFamily="34" charset="-122"/>
                 <a:cs typeface="Arial" pitchFamily="34" charset="-120"/>
               </a:rPr>
-              <a:t>Federal AAN — Book 02 NAC/802.1X · CSI Team Draft — Internal · FedRAMP Moderate · Date Code 2026-07-07 10:15 ET</a:t>
+              <a:t>Federal AAN — Book 02 NAC/802.1X · CSI Team Draft — Internal · FedRAMP Moderate · Date Code 2026-07-07 11:57 ET</a:t>
             </a:r>
             <a:endParaRPr lang="en-US" sz="800" dirty="0"/>
           </a:p>
@@ -17432,7 +17522,7 @@
                 <a:ea typeface="Arial" pitchFamily="34" charset="-122"/>
                 <a:cs typeface="Arial" pitchFamily="34" charset="-120"/>
               </a:rPr>
-              <a:t>Federal AAN — Book 02 NAC/802.1X · CSI Team Draft — Internal · FedRAMP Moderate · Date Code 2026-07-07 10:15 ET</a:t>
+              <a:t>Federal AAN — Book 02 NAC/802.1X · CSI Team Draft — Internal · FedRAMP Moderate · Date Code 2026-07-07 11:57 ET</a:t>
             </a:r>
             <a:endParaRPr lang="en-US" sz="800" dirty="0"/>
           </a:p>
@@ -18738,7 +18828,7 @@
                 <a:ea typeface="Arial" pitchFamily="34" charset="-122"/>
                 <a:cs typeface="Arial" pitchFamily="34" charset="-120"/>
               </a:rPr>
-              <a:t>Federal AAN — Book 02 NAC/802.1X · CSI Team Draft — Internal · FedRAMP Moderate · Date Code 2026-07-07 10:15 ET</a:t>
+              <a:t>Federal AAN — Book 02 NAC/802.1X · CSI Team Draft — Internal · FedRAMP Moderate · Date Code 2026-07-07 11:57 ET</a:t>
             </a:r>
             <a:endParaRPr lang="en-US" sz="800" dirty="0"/>
           </a:p>
@@ -19989,7 +20079,7 @@
                 <a:ea typeface="Arial" pitchFamily="34" charset="-122"/>
                 <a:cs typeface="Arial" pitchFamily="34" charset="-120"/>
               </a:rPr>
-              <a:t>Federal AAN — Book 02 NAC/802.1X · CSI Team Draft — Internal · FedRAMP Moderate · Date Code 2026-07-07 10:15 ET</a:t>
+              <a:t>Federal AAN — Book 02 NAC/802.1X · CSI Team Draft — Internal · FedRAMP Moderate · Date Code 2026-07-07 11:57 ET</a:t>
             </a:r>
             <a:endParaRPr lang="en-US" sz="800" dirty="0"/>
           </a:p>
@@ -21023,7 +21113,7 @@
                 <a:ea typeface="Arial" pitchFamily="34" charset="-122"/>
                 <a:cs typeface="Arial" pitchFamily="34" charset="-120"/>
               </a:rPr>
-              <a:t>WHERE THIS GOES</a:t>
+              <a:t>THE FEDERAL COMPLIANCE CLOCK</a:t>
             </a:r>
             <a:endParaRPr lang="en-US" sz="1100" dirty="0"/>
           </a:p>
@@ -21054,7 +21144,7 @@
               <a:buNone/>
             </a:pPr>
             <a:r>
-              <a:rPr lang="en-US" sz="2600" b="1" dirty="0">
+              <a:rPr lang="en-US" sz="2400" b="1" dirty="0">
                 <a:solidFill>
                   <a:srgbClr val="1F3A5F"/>
                 </a:solidFill>
@@ -21062,9 +21152,9 @@
                 <a:ea typeface="Arial" pitchFamily="34" charset="-122"/>
                 <a:cs typeface="Arial" pitchFamily="34" charset="-120"/>
               </a:rPr>
-              <a:t>From port to token: the NAC → ZTNA continuum</a:t>
-            </a:r>
-            <a:endParaRPr lang="en-US" sz="2600" dirty="0"/>
+              <a:t>Every deadline running against these controls</a:t>
+            </a:r>
+            <a:endParaRPr lang="en-US" sz="2400" dirty="0"/>
           </a:p>
         </p:txBody>
       </p:sp>
@@ -21101,7 +21191,7 @@
                 <a:ea typeface="Arial" pitchFamily="34" charset="-122"/>
                 <a:cs typeface="Arial" pitchFamily="34" charset="-120"/>
               </a:rPr>
-              <a:t>Federal AAN — Book 02 NAC/802.1X · CSI Team Draft — Internal · FedRAMP Moderate · Date Code 2026-07-07 10:15 ET</a:t>
+              <a:t>Federal AAN — Book 02 NAC/802.1X · CSI Team Draft — Internal · FedRAMP Moderate · Date Code 2026-07-07 11:57 ET</a:t>
             </a:r>
             <a:endParaRPr lang="en-US" sz="800" dirty="0"/>
           </a:p>
@@ -21141,6 +21231,1005 @@
                 <a:cs typeface="Arial" pitchFamily="34" charset="-120"/>
               </a:rPr>
               <a:t>26</a:t>
+            </a:r>
+            <a:endParaRPr lang="en-US" sz="800" dirty="0"/>
+          </a:p>
+        </p:txBody>
+      </p:sp>
+      <p:sp>
+        <p:nvSpPr>
+          <p:cNvPr id="6" name="Shape 4"/>
+          <p:cNvSpPr/>
+          <p:nvPr/>
+        </p:nvSpPr>
+        <p:spPr>
+          <a:xfrm>
+            <a:off x="658368" y="1271016"/>
+            <a:ext cx="118872" cy="118872"/>
+          </a:xfrm>
+          <a:prstGeom prst="ellipse">
+            <a:avLst/>
+          </a:prstGeom>
+          <a:solidFill>
+            <a:srgbClr val="1A9E8F"/>
+          </a:solidFill>
+          <a:ln/>
+        </p:spPr>
+      </p:sp>
+      <p:sp>
+        <p:nvSpPr>
+          <p:cNvPr id="7" name="Text 5"/>
+          <p:cNvSpPr/>
+          <p:nvPr/>
+        </p:nvSpPr>
+        <p:spPr>
+          <a:xfrm>
+            <a:off x="896112" y="1225296"/>
+            <a:ext cx="7818120" cy="365760"/>
+          </a:xfrm>
+          <a:prstGeom prst="rect">
+            <a:avLst/>
+          </a:prstGeom>
+          <a:noFill/>
+          <a:ln/>
+        </p:spPr>
+        <p:txBody>
+          <a:bodyPr wrap="square" lIns="0" tIns="0" rIns="0" bIns="0" rtlCol="0" anchor="t"/>
+          <a:lstStyle/>
+          <a:p>
+            <a:pPr indent="0" marL="0">
+              <a:buNone/>
+            </a:pPr>
+            <a:r>
+              <a:rPr lang="en-US" sz="1000" b="1" dirty="0">
+                <a:solidFill>
+                  <a:srgbClr val="1A9E8F"/>
+                </a:solidFill>
+                <a:latin typeface="Arial" pitchFamily="34" charset="0"/>
+                <a:ea typeface="Arial" pitchFamily="34" charset="-122"/>
+                <a:cs typeface="Arial" pitchFamily="34" charset="-120"/>
+              </a:rPr>
+              <a:t>Aug 3 / 31, 2026  </a:t>
+            </a:r>
+            <a:pPr indent="0" marL="0">
+              <a:buNone/>
+            </a:pPr>
+            <a:r>
+              <a:rPr lang="en-US" sz="950" dirty="0">
+                <a:solidFill>
+                  <a:srgbClr val="1E293B"/>
+                </a:solidFill>
+                <a:latin typeface="Arial" pitchFamily="34" charset="0"/>
+                <a:ea typeface="Arial" pitchFamily="34" charset="-122"/>
+                <a:cs typeface="Arial" pitchFamily="34" charset="-120"/>
+              </a:rPr>
+              <a:t>FedRAMP 20x opens — Class A, then Class B + C: the GCC Moderate window</a:t>
+            </a:r>
+            <a:endParaRPr lang="en-US" sz="1000" dirty="0"/>
+          </a:p>
+        </p:txBody>
+      </p:sp>
+      <p:sp>
+        <p:nvSpPr>
+          <p:cNvPr id="8" name="Shape 6"/>
+          <p:cNvSpPr/>
+          <p:nvPr/>
+        </p:nvSpPr>
+        <p:spPr>
+          <a:xfrm>
+            <a:off x="713232" y="1408176"/>
+            <a:ext cx="0" cy="256032"/>
+          </a:xfrm>
+          <a:prstGeom prst="line">
+            <a:avLst/>
+          </a:prstGeom>
+          <a:noFill/>
+          <a:ln w="19050">
+            <a:solidFill>
+              <a:srgbClr val="C9D4E0"/>
+            </a:solidFill>
+            <a:prstDash val="solid"/>
+          </a:ln>
+        </p:spPr>
+      </p:sp>
+      <p:sp>
+        <p:nvSpPr>
+          <p:cNvPr id="9" name="Shape 7"/>
+          <p:cNvSpPr/>
+          <p:nvPr/>
+        </p:nvSpPr>
+        <p:spPr>
+          <a:xfrm>
+            <a:off x="658368" y="1673352"/>
+            <a:ext cx="118872" cy="118872"/>
+          </a:xfrm>
+          <a:prstGeom prst="ellipse">
+            <a:avLst/>
+          </a:prstGeom>
+          <a:solidFill>
+            <a:srgbClr val="D4860B"/>
+          </a:solidFill>
+          <a:ln/>
+        </p:spPr>
+      </p:sp>
+      <p:sp>
+        <p:nvSpPr>
+          <p:cNvPr id="10" name="Text 8"/>
+          <p:cNvSpPr/>
+          <p:nvPr/>
+        </p:nvSpPr>
+        <p:spPr>
+          <a:xfrm>
+            <a:off x="896112" y="1627632"/>
+            <a:ext cx="7818120" cy="365760"/>
+          </a:xfrm>
+          <a:prstGeom prst="rect">
+            <a:avLst/>
+          </a:prstGeom>
+          <a:noFill/>
+          <a:ln/>
+        </p:spPr>
+        <p:txBody>
+          <a:bodyPr wrap="square" lIns="0" tIns="0" rIns="0" bIns="0" rtlCol="0" anchor="t"/>
+          <a:lstStyle/>
+          <a:p>
+            <a:pPr indent="0" marL="0">
+              <a:buNone/>
+            </a:pPr>
+            <a:r>
+              <a:rPr lang="en-US" sz="1000" b="1" dirty="0">
+                <a:solidFill>
+                  <a:srgbClr val="D4860B"/>
+                </a:solidFill>
+                <a:latin typeface="Arial" pitchFamily="34" charset="0"/>
+                <a:ea typeface="Arial" pitchFamily="34" charset="-122"/>
+                <a:cs typeface="Arial" pitchFamily="34" charset="-120"/>
+              </a:rPr>
+              <a:t>Aug 7, 2026  </a:t>
+            </a:r>
+            <a:pPr indent="0" marL="0">
+              <a:buNone/>
+            </a:pPr>
+            <a:r>
+              <a:rPr lang="en-US" sz="950" dirty="0">
+                <a:solidFill>
+                  <a:srgbClr val="1E293B"/>
+                </a:solidFill>
+                <a:latin typeface="Arial" pitchFamily="34" charset="0"/>
+                <a:ea typeface="Arial" pitchFamily="34" charset="-122"/>
+                <a:cs typeface="Arial" pitchFamily="34" charset="-120"/>
+              </a:rPr>
+              <a:t>BOD 26-04: agency vulnerability-management policies must support risk-based remediation</a:t>
+            </a:r>
+            <a:endParaRPr lang="en-US" sz="1000" dirty="0"/>
+          </a:p>
+        </p:txBody>
+      </p:sp>
+      <p:sp>
+        <p:nvSpPr>
+          <p:cNvPr id="11" name="Shape 9"/>
+          <p:cNvSpPr/>
+          <p:nvPr/>
+        </p:nvSpPr>
+        <p:spPr>
+          <a:xfrm>
+            <a:off x="713232" y="1810512"/>
+            <a:ext cx="0" cy="256032"/>
+          </a:xfrm>
+          <a:prstGeom prst="line">
+            <a:avLst/>
+          </a:prstGeom>
+          <a:noFill/>
+          <a:ln w="19050">
+            <a:solidFill>
+              <a:srgbClr val="C9D4E0"/>
+            </a:solidFill>
+            <a:prstDash val="solid"/>
+          </a:ln>
+        </p:spPr>
+      </p:sp>
+      <p:sp>
+        <p:nvSpPr>
+          <p:cNvPr id="12" name="Shape 10"/>
+          <p:cNvSpPr/>
+          <p:nvPr/>
+        </p:nvSpPr>
+        <p:spPr>
+          <a:xfrm>
+            <a:off x="658368" y="2075688"/>
+            <a:ext cx="118872" cy="118872"/>
+          </a:xfrm>
+          <a:prstGeom prst="ellipse">
+            <a:avLst/>
+          </a:prstGeom>
+          <a:solidFill>
+            <a:srgbClr val="C0392B"/>
+          </a:solidFill>
+          <a:ln/>
+        </p:spPr>
+      </p:sp>
+      <p:sp>
+        <p:nvSpPr>
+          <p:cNvPr id="13" name="Text 11"/>
+          <p:cNvSpPr/>
+          <p:nvPr/>
+        </p:nvSpPr>
+        <p:spPr>
+          <a:xfrm>
+            <a:off x="896112" y="2029968"/>
+            <a:ext cx="7818120" cy="365760"/>
+          </a:xfrm>
+          <a:prstGeom prst="rect">
+            <a:avLst/>
+          </a:prstGeom>
+          <a:noFill/>
+          <a:ln/>
+        </p:spPr>
+        <p:txBody>
+          <a:bodyPr wrap="square" lIns="0" tIns="0" rIns="0" bIns="0" rtlCol="0" anchor="t"/>
+          <a:lstStyle/>
+          <a:p>
+            <a:pPr indent="0" marL="0">
+              <a:buNone/>
+            </a:pPr>
+            <a:r>
+              <a:rPr lang="en-US" sz="1000" b="1" dirty="0">
+                <a:solidFill>
+                  <a:srgbClr val="C0392B"/>
+                </a:solidFill>
+                <a:latin typeface="Arial" pitchFamily="34" charset="0"/>
+                <a:ea typeface="Arial" pitchFamily="34" charset="-122"/>
+                <a:cs typeface="Arial" pitchFamily="34" charset="-120"/>
+              </a:rPr>
+              <a:t>Sep 21, 2026  </a:t>
+            </a:r>
+            <a:pPr indent="0" marL="0">
+              <a:buNone/>
+            </a:pPr>
+            <a:r>
+              <a:rPr lang="en-US" sz="950" dirty="0">
+                <a:solidFill>
+                  <a:srgbClr val="1E293B"/>
+                </a:solidFill>
+                <a:latin typeface="Arial" pitchFamily="34" charset="0"/>
+                <a:ea typeface="Arial" pitchFamily="34" charset="-122"/>
+                <a:cs typeface="Arial" pitchFamily="34" charset="-120"/>
+              </a:rPr>
+              <a:t>FIPS 140-2 certificates move to NIST's Historical List — verify FIPS 140-3 tracking (SC-13)</a:t>
+            </a:r>
+            <a:endParaRPr lang="en-US" sz="1000" dirty="0"/>
+          </a:p>
+        </p:txBody>
+      </p:sp>
+      <p:sp>
+        <p:nvSpPr>
+          <p:cNvPr id="14" name="Shape 12"/>
+          <p:cNvSpPr/>
+          <p:nvPr/>
+        </p:nvSpPr>
+        <p:spPr>
+          <a:xfrm>
+            <a:off x="713232" y="2212848"/>
+            <a:ext cx="0" cy="256032"/>
+          </a:xfrm>
+          <a:prstGeom prst="line">
+            <a:avLst/>
+          </a:prstGeom>
+          <a:noFill/>
+          <a:ln w="19050">
+            <a:solidFill>
+              <a:srgbClr val="C9D4E0"/>
+            </a:solidFill>
+            <a:prstDash val="solid"/>
+          </a:ln>
+        </p:spPr>
+      </p:sp>
+      <p:sp>
+        <p:nvSpPr>
+          <p:cNvPr id="15" name="Shape 13"/>
+          <p:cNvSpPr/>
+          <p:nvPr/>
+        </p:nvSpPr>
+        <p:spPr>
+          <a:xfrm>
+            <a:off x="658368" y="2478024"/>
+            <a:ext cx="118872" cy="118872"/>
+          </a:xfrm>
+          <a:prstGeom prst="ellipse">
+            <a:avLst/>
+          </a:prstGeom>
+          <a:solidFill>
+            <a:srgbClr val="C0392B"/>
+          </a:solidFill>
+          <a:ln/>
+        </p:spPr>
+      </p:sp>
+      <p:sp>
+        <p:nvSpPr>
+          <p:cNvPr id="16" name="Text 14"/>
+          <p:cNvSpPr/>
+          <p:nvPr/>
+        </p:nvSpPr>
+        <p:spPr>
+          <a:xfrm>
+            <a:off x="896112" y="2432304"/>
+            <a:ext cx="7818120" cy="365760"/>
+          </a:xfrm>
+          <a:prstGeom prst="rect">
+            <a:avLst/>
+          </a:prstGeom>
+          <a:noFill/>
+          <a:ln/>
+        </p:spPr>
+        <p:txBody>
+          <a:bodyPr wrap="square" lIns="0" tIns="0" rIns="0" bIns="0" rtlCol="0" anchor="t"/>
+          <a:lstStyle/>
+          <a:p>
+            <a:pPr indent="0" marL="0">
+              <a:buNone/>
+            </a:pPr>
+            <a:r>
+              <a:rPr lang="en-US" sz="1000" b="1" dirty="0">
+                <a:solidFill>
+                  <a:srgbClr val="C0392B"/>
+                </a:solidFill>
+                <a:latin typeface="Arial" pitchFamily="34" charset="0"/>
+                <a:ea typeface="Arial" pitchFamily="34" charset="-122"/>
+                <a:cs typeface="Arial" pitchFamily="34" charset="-120"/>
+              </a:rPr>
+              <a:t>Dec 7, 2026  </a:t>
+            </a:r>
+            <a:pPr indent="0" marL="0">
+              <a:buNone/>
+            </a:pPr>
+            <a:r>
+              <a:rPr lang="en-US" sz="950" dirty="0">
+                <a:solidFill>
+                  <a:srgbClr val="1E293B"/>
+                </a:solidFill>
+                <a:latin typeface="Arial" pitchFamily="34" charset="0"/>
+                <a:ea typeface="Arial" pitchFamily="34" charset="-122"/>
+                <a:cs typeface="Arial" pitchFamily="34" charset="-120"/>
+              </a:rPr>
+              <a:t>BOD 26-04 remediation timelines in force + FedRAMP VDR/VER mandatory (SBOM + vendor disclosure)</a:t>
+            </a:r>
+            <a:endParaRPr lang="en-US" sz="1000" dirty="0"/>
+          </a:p>
+        </p:txBody>
+      </p:sp>
+      <p:sp>
+        <p:nvSpPr>
+          <p:cNvPr id="17" name="Shape 15"/>
+          <p:cNvSpPr/>
+          <p:nvPr/>
+        </p:nvSpPr>
+        <p:spPr>
+          <a:xfrm>
+            <a:off x="713232" y="2615184"/>
+            <a:ext cx="0" cy="256032"/>
+          </a:xfrm>
+          <a:prstGeom prst="line">
+            <a:avLst/>
+          </a:prstGeom>
+          <a:noFill/>
+          <a:ln w="19050">
+            <a:solidFill>
+              <a:srgbClr val="C9D4E0"/>
+            </a:solidFill>
+            <a:prstDash val="solid"/>
+          </a:ln>
+        </p:spPr>
+      </p:sp>
+      <p:sp>
+        <p:nvSpPr>
+          <p:cNvPr id="18" name="Shape 16"/>
+          <p:cNvSpPr/>
+          <p:nvPr/>
+        </p:nvSpPr>
+        <p:spPr>
+          <a:xfrm>
+            <a:off x="658368" y="2880360"/>
+            <a:ext cx="118872" cy="118872"/>
+          </a:xfrm>
+          <a:prstGeom prst="ellipse">
+            <a:avLst/>
+          </a:prstGeom>
+          <a:solidFill>
+            <a:srgbClr val="1F3A5F"/>
+          </a:solidFill>
+          <a:ln/>
+        </p:spPr>
+      </p:sp>
+      <p:sp>
+        <p:nvSpPr>
+          <p:cNvPr id="19" name="Text 17"/>
+          <p:cNvSpPr/>
+          <p:nvPr/>
+        </p:nvSpPr>
+        <p:spPr>
+          <a:xfrm>
+            <a:off x="896112" y="2834640"/>
+            <a:ext cx="7818120" cy="365760"/>
+          </a:xfrm>
+          <a:prstGeom prst="rect">
+            <a:avLst/>
+          </a:prstGeom>
+          <a:noFill/>
+          <a:ln/>
+        </p:spPr>
+        <p:txBody>
+          <a:bodyPr wrap="square" lIns="0" tIns="0" rIns="0" bIns="0" rtlCol="0" anchor="t"/>
+          <a:lstStyle/>
+          <a:p>
+            <a:pPr indent="0" marL="0">
+              <a:buNone/>
+            </a:pPr>
+            <a:r>
+              <a:rPr lang="en-US" sz="1000" b="1" dirty="0">
+                <a:solidFill>
+                  <a:srgbClr val="1F3A5F"/>
+                </a:solidFill>
+                <a:latin typeface="Arial" pitchFamily="34" charset="0"/>
+                <a:ea typeface="Arial" pitchFamily="34" charset="-122"/>
+                <a:cs typeface="Arial" pitchFamily="34" charset="-120"/>
+              </a:rPr>
+              <a:t>Jan 1, 2027  </a:t>
+            </a:r>
+            <a:pPr indent="0" marL="0">
+              <a:buNone/>
+            </a:pPr>
+            <a:r>
+              <a:rPr lang="en-US" sz="950" dirty="0">
+                <a:solidFill>
+                  <a:srgbClr val="1E293B"/>
+                </a:solidFill>
+                <a:latin typeface="Arial" pitchFamily="34" charset="0"/>
+                <a:ea typeface="Arial" pitchFamily="34" charset="-122"/>
+                <a:cs typeface="Arial" pitchFamily="34" charset="-120"/>
+              </a:rPr>
+              <a:t>FedRAMP CR26 mandatory for all · CNSA 2.0 acquisition gate (NSS-scoped; civilian PQC follows)</a:t>
+            </a:r>
+            <a:endParaRPr lang="en-US" sz="1000" dirty="0"/>
+          </a:p>
+        </p:txBody>
+      </p:sp>
+      <p:sp>
+        <p:nvSpPr>
+          <p:cNvPr id="20" name="Shape 18"/>
+          <p:cNvSpPr/>
+          <p:nvPr/>
+        </p:nvSpPr>
+        <p:spPr>
+          <a:xfrm>
+            <a:off x="713232" y="3017520"/>
+            <a:ext cx="0" cy="256032"/>
+          </a:xfrm>
+          <a:prstGeom prst="line">
+            <a:avLst/>
+          </a:prstGeom>
+          <a:noFill/>
+          <a:ln w="19050">
+            <a:solidFill>
+              <a:srgbClr val="C9D4E0"/>
+            </a:solidFill>
+            <a:prstDash val="solid"/>
+          </a:ln>
+        </p:spPr>
+      </p:sp>
+      <p:sp>
+        <p:nvSpPr>
+          <p:cNvPr id="21" name="Shape 19"/>
+          <p:cNvSpPr/>
+          <p:nvPr/>
+        </p:nvSpPr>
+        <p:spPr>
+          <a:xfrm>
+            <a:off x="658368" y="3282696"/>
+            <a:ext cx="118872" cy="118872"/>
+          </a:xfrm>
+          <a:prstGeom prst="ellipse">
+            <a:avLst/>
+          </a:prstGeom>
+          <a:solidFill>
+            <a:srgbClr val="1F3A5F"/>
+          </a:solidFill>
+          <a:ln/>
+        </p:spPr>
+      </p:sp>
+      <p:sp>
+        <p:nvSpPr>
+          <p:cNvPr id="22" name="Text 20"/>
+          <p:cNvSpPr/>
+          <p:nvPr/>
+        </p:nvSpPr>
+        <p:spPr>
+          <a:xfrm>
+            <a:off x="896112" y="3236976"/>
+            <a:ext cx="7818120" cy="365760"/>
+          </a:xfrm>
+          <a:prstGeom prst="rect">
+            <a:avLst/>
+          </a:prstGeom>
+          <a:noFill/>
+          <a:ln/>
+        </p:spPr>
+        <p:txBody>
+          <a:bodyPr wrap="square" lIns="0" tIns="0" rIns="0" bIns="0" rtlCol="0" anchor="t"/>
+          <a:lstStyle/>
+          <a:p>
+            <a:pPr indent="0" marL="0">
+              <a:buNone/>
+            </a:pPr>
+            <a:r>
+              <a:rPr lang="en-US" sz="1000" b="1" dirty="0">
+                <a:solidFill>
+                  <a:srgbClr val="1F3A5F"/>
+                </a:solidFill>
+                <a:latin typeface="Arial" pitchFamily="34" charset="0"/>
+                <a:ea typeface="Arial" pitchFamily="34" charset="-122"/>
+                <a:cs typeface="Arial" pitchFamily="34" charset="-120"/>
+              </a:rPr>
+              <a:t>Jun 11, 2027  </a:t>
+            </a:r>
+            <a:pPr indent="0" marL="0">
+              <a:buNone/>
+            </a:pPr>
+            <a:r>
+              <a:rPr lang="en-US" sz="950" dirty="0">
+                <a:solidFill>
+                  <a:srgbClr val="1E293B"/>
+                </a:solidFill>
+                <a:latin typeface="Arial" pitchFamily="34" charset="0"/>
+                <a:ea typeface="Arial" pitchFamily="34" charset="-122"/>
+                <a:cs typeface="Arial" pitchFamily="34" charset="-120"/>
+              </a:rPr>
+              <a:t>No new Rev5 certifications accepted</a:t>
+            </a:r>
+            <a:endParaRPr lang="en-US" sz="1000" dirty="0"/>
+          </a:p>
+        </p:txBody>
+      </p:sp>
+      <p:sp>
+        <p:nvSpPr>
+          <p:cNvPr id="23" name="Shape 21"/>
+          <p:cNvSpPr/>
+          <p:nvPr/>
+        </p:nvSpPr>
+        <p:spPr>
+          <a:xfrm>
+            <a:off x="713232" y="3419856"/>
+            <a:ext cx="0" cy="256032"/>
+          </a:xfrm>
+          <a:prstGeom prst="line">
+            <a:avLst/>
+          </a:prstGeom>
+          <a:noFill/>
+          <a:ln w="19050">
+            <a:solidFill>
+              <a:srgbClr val="C9D4E0"/>
+            </a:solidFill>
+            <a:prstDash val="solid"/>
+          </a:ln>
+        </p:spPr>
+      </p:sp>
+      <p:sp>
+        <p:nvSpPr>
+          <p:cNvPr id="24" name="Shape 22"/>
+          <p:cNvSpPr/>
+          <p:nvPr/>
+        </p:nvSpPr>
+        <p:spPr>
+          <a:xfrm>
+            <a:off x="658368" y="3685032"/>
+            <a:ext cx="118872" cy="118872"/>
+          </a:xfrm>
+          <a:prstGeom prst="ellipse">
+            <a:avLst/>
+          </a:prstGeom>
+          <a:solidFill>
+            <a:srgbClr val="D4860B"/>
+          </a:solidFill>
+          <a:ln/>
+        </p:spPr>
+      </p:sp>
+      <p:sp>
+        <p:nvSpPr>
+          <p:cNvPr id="25" name="Text 23"/>
+          <p:cNvSpPr/>
+          <p:nvPr/>
+        </p:nvSpPr>
+        <p:spPr>
+          <a:xfrm>
+            <a:off x="896112" y="3639312"/>
+            <a:ext cx="7818120" cy="365760"/>
+          </a:xfrm>
+          <a:prstGeom prst="rect">
+            <a:avLst/>
+          </a:prstGeom>
+          <a:noFill/>
+          <a:ln/>
+        </p:spPr>
+        <p:txBody>
+          <a:bodyPr wrap="square" lIns="0" tIns="0" rIns="0" bIns="0" rtlCol="0" anchor="t"/>
+          <a:lstStyle/>
+          <a:p>
+            <a:pPr indent="0" marL="0">
+              <a:buNone/>
+            </a:pPr>
+            <a:r>
+              <a:rPr lang="en-US" sz="1000" b="1" dirty="0">
+                <a:solidFill>
+                  <a:srgbClr val="D4860B"/>
+                </a:solidFill>
+                <a:latin typeface="Arial" pitchFamily="34" charset="0"/>
+                <a:ea typeface="Arial" pitchFamily="34" charset="-122"/>
+                <a:cs typeface="Arial" pitchFamily="34" charset="-120"/>
+              </a:rPr>
+              <a:t>~Aug 2027  </a:t>
+            </a:r>
+            <a:pPr indent="0" marL="0">
+              <a:buNone/>
+            </a:pPr>
+            <a:r>
+              <a:rPr lang="en-US" sz="950" dirty="0">
+                <a:solidFill>
+                  <a:srgbClr val="1E293B"/>
+                </a:solidFill>
+                <a:latin typeface="Arial" pitchFamily="34" charset="0"/>
+                <a:ea typeface="Arial" pitchFamily="34" charset="-122"/>
+                <a:cs typeface="Arial" pitchFamily="34" charset="-120"/>
+              </a:rPr>
+              <a:t>Next scheduled NIST 800-53 release — 5.2.0 (Aug 2025) already added SA-15(13), SA-24, SI-2(7)</a:t>
+            </a:r>
+            <a:endParaRPr lang="en-US" sz="1000" dirty="0"/>
+          </a:p>
+        </p:txBody>
+      </p:sp>
+      <p:sp>
+        <p:nvSpPr>
+          <p:cNvPr id="26" name="Shape 24"/>
+          <p:cNvSpPr/>
+          <p:nvPr/>
+        </p:nvSpPr>
+        <p:spPr>
+          <a:xfrm>
+            <a:off x="713232" y="3822192"/>
+            <a:ext cx="0" cy="256032"/>
+          </a:xfrm>
+          <a:prstGeom prst="line">
+            <a:avLst/>
+          </a:prstGeom>
+          <a:noFill/>
+          <a:ln w="19050">
+            <a:solidFill>
+              <a:srgbClr val="C9D4E0"/>
+            </a:solidFill>
+            <a:prstDash val="solid"/>
+          </a:ln>
+        </p:spPr>
+      </p:sp>
+      <p:sp>
+        <p:nvSpPr>
+          <p:cNvPr id="27" name="Shape 25"/>
+          <p:cNvSpPr/>
+          <p:nvPr/>
+        </p:nvSpPr>
+        <p:spPr>
+          <a:xfrm>
+            <a:off x="658368" y="4087368"/>
+            <a:ext cx="118872" cy="118872"/>
+          </a:xfrm>
+          <a:prstGeom prst="ellipse">
+            <a:avLst/>
+          </a:prstGeom>
+          <a:solidFill>
+            <a:srgbClr val="5B6B7C"/>
+          </a:solidFill>
+          <a:ln/>
+        </p:spPr>
+      </p:sp>
+      <p:sp>
+        <p:nvSpPr>
+          <p:cNvPr id="28" name="Text 26"/>
+          <p:cNvSpPr/>
+          <p:nvPr/>
+        </p:nvSpPr>
+        <p:spPr>
+          <a:xfrm>
+            <a:off x="896112" y="4041648"/>
+            <a:ext cx="7818120" cy="365760"/>
+          </a:xfrm>
+          <a:prstGeom prst="rect">
+            <a:avLst/>
+          </a:prstGeom>
+          <a:noFill/>
+          <a:ln/>
+        </p:spPr>
+        <p:txBody>
+          <a:bodyPr wrap="square" lIns="0" tIns="0" rIns="0" bIns="0" rtlCol="0" anchor="t"/>
+          <a:lstStyle/>
+          <a:p>
+            <a:pPr indent="0" marL="0">
+              <a:buNone/>
+            </a:pPr>
+            <a:r>
+              <a:rPr lang="en-US" sz="1000" b="1" dirty="0">
+                <a:solidFill>
+                  <a:srgbClr val="5B6B7C"/>
+                </a:solidFill>
+                <a:latin typeface="Arial" pitchFamily="34" charset="0"/>
+                <a:ea typeface="Arial" pitchFamily="34" charset="-122"/>
+                <a:cs typeface="Arial" pitchFamily="34" charset="-120"/>
+              </a:rPr>
+              <a:t>2030 / 2035  </a:t>
+            </a:r>
+            <a:pPr indent="0" marL="0">
+              <a:buNone/>
+            </a:pPr>
+            <a:r>
+              <a:rPr lang="en-US" sz="950" dirty="0">
+                <a:solidFill>
+                  <a:srgbClr val="1E293B"/>
+                </a:solidFill>
+                <a:latin typeface="Arial" pitchFamily="34" charset="0"/>
+                <a:ea typeface="Arial" pitchFamily="34" charset="-122"/>
+                <a:cs typeface="Arial" pitchFamily="34" charset="-120"/>
+              </a:rPr>
+              <a:t>Quantum-vulnerable cryptography deprecated, then prohibited — M-23-02 inventories run to the horizon</a:t>
+            </a:r>
+            <a:endParaRPr lang="en-US" sz="1000" dirty="0"/>
+          </a:p>
+        </p:txBody>
+      </p:sp>
+      <p:sp>
+        <p:nvSpPr>
+          <p:cNvPr id="29" name="Shape 27"/>
+          <p:cNvSpPr/>
+          <p:nvPr/>
+        </p:nvSpPr>
+        <p:spPr>
+          <a:xfrm>
+            <a:off x="502920" y="4462272"/>
+            <a:ext cx="8229600" cy="365760"/>
+          </a:xfrm>
+          <a:prstGeom prst="roundRect">
+            <a:avLst>
+              <a:gd name="adj" fmla="val 17500"/>
+            </a:avLst>
+          </a:prstGeom>
+          <a:solidFill>
+            <a:srgbClr val="EDF3F9"/>
+          </a:solidFill>
+          <a:ln w="9525">
+            <a:solidFill>
+              <a:srgbClr val="C9D4E0"/>
+            </a:solidFill>
+            <a:prstDash val="solid"/>
+          </a:ln>
+        </p:spPr>
+      </p:sp>
+      <p:sp>
+        <p:nvSpPr>
+          <p:cNvPr id="30" name="Text 28"/>
+          <p:cNvSpPr/>
+          <p:nvPr/>
+        </p:nvSpPr>
+        <p:spPr>
+          <a:xfrm>
+            <a:off x="731520" y="4462272"/>
+            <a:ext cx="7772400" cy="365760"/>
+          </a:xfrm>
+          <a:prstGeom prst="rect">
+            <a:avLst/>
+          </a:prstGeom>
+          <a:noFill/>
+          <a:ln/>
+        </p:spPr>
+        <p:txBody>
+          <a:bodyPr wrap="square" lIns="0" tIns="0" rIns="0" bIns="0" rtlCol="0" anchor="ctr"/>
+          <a:lstStyle/>
+          <a:p>
+            <a:pPr indent="0" marL="0">
+              <a:buNone/>
+            </a:pPr>
+            <a:r>
+              <a:rPr lang="en-US" sz="850" b="1" dirty="0">
+                <a:solidFill>
+                  <a:srgbClr val="1F3A5F"/>
+                </a:solidFill>
+                <a:latin typeface="Arial" pitchFamily="34" charset="0"/>
+                <a:ea typeface="Arial" pitchFamily="34" charset="-122"/>
+                <a:cs typeface="Arial" pitchFamily="34" charset="-120"/>
+              </a:rPr>
+              <a:t>SSOT for federal dates: the Federal AAN / ConMon Gap Roadmap (verified 2026-07-07). Already in force: M-21-31 logging, M-21-07 IPv6, M-22-09 Zero Trust (continued by M-24-14 / M-25-04), BOD 25-01 SCuBA.</a:t>
+            </a:r>
+            <a:endParaRPr lang="en-US" sz="850" dirty="0"/>
+          </a:p>
+        </p:txBody>
+      </p:sp>
+    </p:spTree>
+  </p:cSld>
+  <p:clrMapOvr>
+    <a:masterClrMapping/>
+  </p:clrMapOvr>
+</p:sld>
+</file>
+
+<file path=ppt/slides/slide27.xml><?xml version="1.0" encoding="utf-8"?>
+<p:sld xmlns:a="http://schemas.openxmlformats.org/drawingml/2006/main" xmlns:r="http://schemas.openxmlformats.org/officeDocument/2006/relationships" xmlns:p="http://schemas.openxmlformats.org/presentationml/2006/main">
+  <p:cSld name="Slide 27">
+    <p:bg>
+      <p:bgPr>
+        <a:solidFill>
+          <a:srgbClr val="FFFFFF"/>
+        </a:solidFill>
+      </p:bgPr>
+    </p:bg>
+    <p:spTree>
+      <p:nvGrpSpPr>
+        <p:cNvPr id="1" name=""/>
+        <p:cNvGrpSpPr/>
+        <p:nvPr/>
+      </p:nvGrpSpPr>
+      <p:grpSpPr>
+        <a:xfrm>
+          <a:off x="0" y="0"/>
+          <a:ext cx="0" cy="0"/>
+          <a:chOff x="0" y="0"/>
+          <a:chExt cx="0" cy="0"/>
+        </a:xfrm>
+      </p:grpSpPr>
+      <p:sp>
+        <p:nvSpPr>
+          <p:cNvPr id="2" name="Text 0"/>
+          <p:cNvSpPr/>
+          <p:nvPr/>
+        </p:nvSpPr>
+        <p:spPr>
+          <a:xfrm>
+            <a:off x="502920" y="256032"/>
+            <a:ext cx="8229600" cy="274320"/>
+          </a:xfrm>
+          <a:prstGeom prst="rect">
+            <a:avLst/>
+          </a:prstGeom>
+          <a:noFill/>
+          <a:ln/>
+        </p:spPr>
+        <p:txBody>
+          <a:bodyPr wrap="square" lIns="0" tIns="0" rIns="0" bIns="0" rtlCol="0" anchor="ctr"/>
+          <a:lstStyle/>
+          <a:p>
+            <a:pPr indent="0" marL="0">
+              <a:buNone/>
+            </a:pPr>
+            <a:r>
+              <a:rPr lang="en-US" sz="1100" b="1" spc="200" kern="0" dirty="0">
+                <a:solidFill>
+                  <a:srgbClr val="1A9E8F"/>
+                </a:solidFill>
+                <a:latin typeface="Arial" pitchFamily="34" charset="0"/>
+                <a:ea typeface="Arial" pitchFamily="34" charset="-122"/>
+                <a:cs typeface="Arial" pitchFamily="34" charset="-120"/>
+              </a:rPr>
+              <a:t>WHERE THIS GOES</a:t>
+            </a:r>
+            <a:endParaRPr lang="en-US" sz="1100" dirty="0"/>
+          </a:p>
+        </p:txBody>
+      </p:sp>
+      <p:sp>
+        <p:nvSpPr>
+          <p:cNvPr id="3" name="Text 1"/>
+          <p:cNvSpPr/>
+          <p:nvPr/>
+        </p:nvSpPr>
+        <p:spPr>
+          <a:xfrm>
+            <a:off x="502920" y="512064"/>
+            <a:ext cx="8138160" cy="566928"/>
+          </a:xfrm>
+          <a:prstGeom prst="rect">
+            <a:avLst/>
+          </a:prstGeom>
+          <a:noFill/>
+          <a:ln/>
+        </p:spPr>
+        <p:txBody>
+          <a:bodyPr wrap="square" lIns="0" tIns="0" rIns="0" bIns="0" rtlCol="0" anchor="ctr"/>
+          <a:lstStyle/>
+          <a:p>
+            <a:pPr indent="0" marL="0">
+              <a:buNone/>
+            </a:pPr>
+            <a:r>
+              <a:rPr lang="en-US" sz="2600" b="1" dirty="0">
+                <a:solidFill>
+                  <a:srgbClr val="1F3A5F"/>
+                </a:solidFill>
+                <a:latin typeface="Arial" pitchFamily="34" charset="0"/>
+                <a:ea typeface="Arial" pitchFamily="34" charset="-122"/>
+                <a:cs typeface="Arial" pitchFamily="34" charset="-120"/>
+              </a:rPr>
+              <a:t>From port to token: the NAC → ZTNA continuum</a:t>
+            </a:r>
+            <a:endParaRPr lang="en-US" sz="2600" dirty="0"/>
+          </a:p>
+        </p:txBody>
+      </p:sp>
+      <p:sp>
+        <p:nvSpPr>
+          <p:cNvPr id="4" name="Text 2"/>
+          <p:cNvSpPr/>
+          <p:nvPr/>
+        </p:nvSpPr>
+        <p:spPr>
+          <a:xfrm>
+            <a:off x="502920" y="4864608"/>
+            <a:ext cx="7315200" cy="219456"/>
+          </a:xfrm>
+          <a:prstGeom prst="rect">
+            <a:avLst/>
+          </a:prstGeom>
+          <a:noFill/>
+          <a:ln/>
+        </p:spPr>
+        <p:txBody>
+          <a:bodyPr wrap="square" lIns="0" tIns="0" rIns="0" bIns="0" rtlCol="0" anchor="ctr"/>
+          <a:lstStyle/>
+          <a:p>
+            <a:pPr indent="0" marL="0">
+              <a:buNone/>
+            </a:pPr>
+            <a:r>
+              <a:rPr lang="en-US" sz="800" dirty="0">
+                <a:solidFill>
+                  <a:srgbClr val="5B6B7C"/>
+                </a:solidFill>
+                <a:latin typeface="Arial" pitchFamily="34" charset="0"/>
+                <a:ea typeface="Arial" pitchFamily="34" charset="-122"/>
+                <a:cs typeface="Arial" pitchFamily="34" charset="-120"/>
+              </a:rPr>
+              <a:t>Federal AAN — Book 02 NAC/802.1X · CSI Team Draft — Internal · FedRAMP Moderate · Date Code 2026-07-07 11:57 ET</a:t>
+            </a:r>
+            <a:endParaRPr lang="en-US" sz="800" dirty="0"/>
+          </a:p>
+        </p:txBody>
+      </p:sp>
+      <p:sp>
+        <p:nvSpPr>
+          <p:cNvPr id="5" name="Text 3"/>
+          <p:cNvSpPr/>
+          <p:nvPr/>
+        </p:nvSpPr>
+        <p:spPr>
+          <a:xfrm>
+            <a:off x="8412480" y="4864608"/>
+            <a:ext cx="320040" cy="219456"/>
+          </a:xfrm>
+          <a:prstGeom prst="rect">
+            <a:avLst/>
+          </a:prstGeom>
+          <a:noFill/>
+          <a:ln/>
+        </p:spPr>
+        <p:txBody>
+          <a:bodyPr wrap="square" lIns="0" tIns="0" rIns="0" bIns="0" rtlCol="0" anchor="ctr"/>
+          <a:lstStyle/>
+          <a:p>
+            <a:pPr algn="r" indent="0" marL="0">
+              <a:buNone/>
+            </a:pPr>
+            <a:r>
+              <a:rPr lang="en-US" sz="800" dirty="0">
+                <a:solidFill>
+                  <a:srgbClr val="5B6B7C"/>
+                </a:solidFill>
+                <a:latin typeface="Arial" pitchFamily="34" charset="0"/>
+                <a:ea typeface="Arial" pitchFamily="34" charset="-122"/>
+                <a:cs typeface="Arial" pitchFamily="34" charset="-120"/>
+              </a:rPr>
+              <a:t>27</a:t>
             </a:r>
             <a:endParaRPr lang="en-US" sz="800" dirty="0"/>
           </a:p>
@@ -21690,7 +22779,7 @@
                 <a:ea typeface="Arial" pitchFamily="34" charset="-122"/>
                 <a:cs typeface="Arial" pitchFamily="34" charset="-120"/>
               </a:rPr>
-              <a:t>Federal AAN — Book 02 NAC/802.1X · CSI Team Draft — Internal · FedRAMP Moderate · Date Code 2026-07-07 10:15 ET</a:t>
+              <a:t>Federal AAN — Book 02 NAC/802.1X · CSI Team Draft — Internal · FedRAMP Moderate · Date Code 2026-07-07 11:57 ET</a:t>
             </a:r>
             <a:endParaRPr lang="en-US" sz="800" dirty="0"/>
           </a:p>
@@ -22387,7 +23476,7 @@
                 <a:ea typeface="Arial" pitchFamily="34" charset="-122"/>
                 <a:cs typeface="Arial" pitchFamily="34" charset="-120"/>
               </a:rPr>
-              <a:t>Federal AAN — Book 02 NAC/802.1X · CSI Team Draft — Internal · FedRAMP Moderate · Date Code 2026-07-07 10:15 ET</a:t>
+              <a:t>Federal AAN — Book 02 NAC/802.1X · CSI Team Draft — Internal · FedRAMP Moderate · Date Code 2026-07-07 11:57 ET</a:t>
             </a:r>
             <a:endParaRPr lang="en-US" sz="800" dirty="0"/>
           </a:p>
@@ -23301,7 +24390,7 @@
                 <a:ea typeface="Arial" pitchFamily="34" charset="-122"/>
                 <a:cs typeface="Arial" pitchFamily="34" charset="-120"/>
               </a:rPr>
-              <a:t>Federal AAN — Book 02 NAC/802.1X · CSI Team Draft — Internal · FedRAMP Moderate · Date Code 2026-07-07 10:15 ET</a:t>
+              <a:t>Federal AAN — Book 02 NAC/802.1X · CSI Team Draft — Internal · FedRAMP Moderate · Date Code 2026-07-07 11:57 ET</a:t>
             </a:r>
             <a:endParaRPr lang="en-US" sz="800" dirty="0"/>
           </a:p>
@@ -23977,7 +25066,7 @@
                 <a:ea typeface="Arial" pitchFamily="34" charset="-122"/>
                 <a:cs typeface="Arial" pitchFamily="34" charset="-120"/>
               </a:rPr>
-              <a:t>Federal AAN — Book 02 NAC/802.1X · CSI Team Draft — Internal · FedRAMP Moderate · Date Code 2026-07-07 10:15 ET</a:t>
+              <a:t>Federal AAN — Book 02 NAC/802.1X · CSI Team Draft — Internal · FedRAMP Moderate · Date Code 2026-07-07 11:57 ET</a:t>
             </a:r>
             <a:endParaRPr lang="en-US" sz="800" dirty="0"/>
           </a:p>
@@ -24878,7 +25967,7 @@
                 <a:ea typeface="Arial" pitchFamily="34" charset="-122"/>
                 <a:cs typeface="Arial" pitchFamily="34" charset="-120"/>
               </a:rPr>
-              <a:t>Federal AAN — Book 02 NAC/802.1X · CSI Team Draft — Internal · FedRAMP Moderate · Date Code 2026-07-07 10:15 ET</a:t>
+              <a:t>Federal AAN — Book 02 NAC/802.1X · CSI Team Draft — Internal · FedRAMP Moderate · Date Code 2026-07-07 11:57 ET</a:t>
             </a:r>
             <a:endParaRPr lang="en-US" sz="800" dirty="0"/>
           </a:p>
@@ -25781,7 +26870,7 @@
                 <a:ea typeface="Arial" pitchFamily="34" charset="-122"/>
                 <a:cs typeface="Arial" pitchFamily="34" charset="-120"/>
               </a:rPr>
-              <a:t>Federal AAN — Book 02 NAC/802.1X · CSI Team Draft — Internal · FedRAMP Moderate · Date Code 2026-07-07 10:15 ET</a:t>
+              <a:t>Federal AAN — Book 02 NAC/802.1X · CSI Team Draft — Internal · FedRAMP Moderate · Date Code 2026-07-07 11:57 ET</a:t>
             </a:r>
             <a:endParaRPr lang="en-US" sz="800" dirty="0"/>
           </a:p>
@@ -26686,7 +27775,7 @@
                 <a:ea typeface="Arial" pitchFamily="34" charset="-122"/>
                 <a:cs typeface="Arial" pitchFamily="34" charset="-120"/>
               </a:rPr>
-              <a:t>Federal AAN — Book 02 NAC/802.1X · CSI Team Draft — Internal · FedRAMP Moderate · Date Code 2026-07-07 10:15 ET</a:t>
+              <a:t>Federal AAN — Book 02 NAC/802.1X · CSI Team Draft — Internal · FedRAMP Moderate · Date Code 2026-07-07 11:57 ET</a:t>
             </a:r>
             <a:endParaRPr lang="en-US" sz="800" dirty="0"/>
           </a:p>
